--- a/presentation/submission_draft.pptx
+++ b/presentation/submission_draft.pptx
@@ -121,7 +121,7 @@
   <p:extLst>
     <p:ext uri="{521415D9-36F7-43E2-AB2F-B90AF26B5E84}">
       <p14:sectionLst xmlns:p14="http://schemas.microsoft.com/office/powerpoint/2010/main">
-        <p14:section name="作品背景与场景洞察" id="{f15f412f-441b-0d61-638e-102666b13ba8}">
+        <p14:section name="作品背景与场景洞察" id="{a09077f8-824d-046d-360c-c3de32103655}">
           <p14:sldIdLst>
             <p14:sldId id="256"/>
             <p14:sldId id="257"/>
@@ -129,7 +129,7 @@
             <p14:sldId id="259"/>
           </p14:sldIdLst>
         </p14:section>
-        <p14:section name="技术方案" id="{0b7711df-bded-8983-0a55-c991e11d721f}">
+        <p14:section name="技术方案" id="{4e2aa25a-41c7-912c-fa28-6c8e52edcf49}">
           <p14:sldIdLst>
             <p14:sldId id="260"/>
             <p14:sldId id="261"/>
@@ -137,21 +137,21 @@
             <p14:sldId id="263"/>
           </p14:sldIdLst>
         </p14:section>
-        <p14:section name="核心功能演示" id="{8d6eb2f7-38c8-9712-20d2-5a84e55ad2c2}">
+        <p14:section name="核心功能演示" id="{e36846ed-072a-ebc0-206b-524c935be83f}">
           <p14:sldIdLst>
             <p14:sldId id="264"/>
             <p14:sldId id="265"/>
             <p14:sldId id="266"/>
           </p14:sldIdLst>
         </p14:section>
-        <p14:section name="落地价值" id="{433550b6-c2ba-f537-5031-241a708ff171}">
+        <p14:section name="落地价值" id="{e1fe7769-457b-cee2-d0ca-2859ff5b3a13}">
           <p14:sldIdLst>
             <p14:sldId id="267"/>
             <p14:sldId id="268"/>
             <p14:sldId id="269"/>
           </p14:sldIdLst>
         </p14:section>
-        <p14:section name="未来规划" id="{002dbcec-7d8f-5f88-5705-c590bf6f6ca4}">
+        <p14:section name="未来规划" id="{ec62c91b-00aa-0ead-7576-6125957dcb49}">
           <p14:sldIdLst>
             <p14:sldId id="270"/>
           </p14:sldIdLst>
@@ -648,7 +648,7 @@
           <a:p>
             <a:r>
               <a:rPr lang="en-US" dirty="0"/>
-              <a:t>截图来源：evaluation/results/submission_ui_20261010/03_review_and_followup.png。rehearsal.json记录编辑采纳、任务认领和生命周期的操作通过。应用未向买家发送消息，演示任务完成也不修改商家退款状态。</a:t>
+              <a:t>截图来源：evaluation/results/mainline_accuracy_ui_20261014/rehearsal/03_review_and_followup.png。rehearsal.json记录编辑采纳、任务认领和生命周期的操作通过。应用未向买家发送消息，演示任务完成也不修改商家退款状态。</a:t>
             </a:r>
             <a:endParaRPr lang="en-US" dirty="0"/>
           </a:p>
@@ -736,7 +736,7 @@
           <a:p>
             <a:r>
               <a:rPr lang="en-US" dirty="0"/>
-              <a:t>截图来源：evaluation/results/submission_ui_20261010/06_risk_owned.png。场景S00076，消息92900836378476.PNM，2026-05-08 15:53:44。原句是条件式举报表达。系统预警并认领人工任务，不把消费者认定为违规，不判定假货，不提前关闭未核实事项。</a:t>
+              <a:t>截图来源：evaluation/results/mainline_accuracy_ui_20261014/rehearsal/06_risk_owned.png。场景S00076，消息92900836378476.PNM，2026-05-08 15:53:44。原句是条件式举报表达。系统预警并认领人工任务，不把消费者认定为违规，不判定假货，不提前关闭未核实事项。</a:t>
             </a:r>
             <a:endParaRPr lang="en-US" dirty="0"/>
           </a:p>
@@ -912,7 +912,7 @@
           <a:p>
             <a:r>
               <a:rPr lang="en-US" dirty="0"/>
-              <a:t>数据来源：evaluation/results/accuracy_cost_paired_20261009.json和submission_release_20261010_v2/quality_summary_v2.json。三项主要数字均来自10月9日44次交替模型请求的协议对照，排除确定性证据路径。下方另列10月10日12个系统请求，含1个证据路径。不同实验不能合并，小样本顺序运行不代表生产并发SLA、云账单或硬件运营成本。</a:t>
+              <a:t>当前compact-v9-item-issues-2测量来自evaluation/results/mainline_accuracy_release_20261014_final/，输入6783、输出1573、总8356Token，系统中位2834.98ms、最大3685.6ms。原始用量及首遍输出保留。历史CPU/GPU来自gpu_pair_20261013.json，固定同一V7提示，3案例交替两轮各6次；GPU首次较慢样本保留。历史协议节约来自accuracy_cost_paired_20261009.json，总16368→15364，减少6.13%。提示和设备共同变化的完整复测不作单因素归因，小样本不代表生产SLA、完整成本或人工效率。</a:t>
             </a:r>
             <a:endParaRPr lang="en-US" dirty="0"/>
           </a:p>
@@ -1000,7 +1000,7 @@
           <a:p>
             <a:r>
               <a:rPr lang="en-US" dirty="0"/>
-              <a:t>软件回归来源：evaluation/results/submission_release_20261010_v2/regression_20261011.xml。30条人工标注来源及用户确认保留，误点建议按钮不自动认定采用候选。事后规则回归来源：accuracy_cost_frozen_retest_20261009.json，意图Macro-F1从约0.5548降至0.4629。混合情绪词表和场景口径不同，高风险正例为0，不能报告召回。回复检查来源为当前12例质量汇总，0检出不等于100%人工正确率。</a:t>
+              <a:t>当前348项软件证据与12例输出在evaluation/results/mainline_accuracy_release_20261014_final/，30条完整工作流在mainline_frozen_assistance_20261014_final/。最终意图由V8的21/30提升至27/30、Macro-F1约0.6176；基础情绪21/30约0.6511、风险27/30未提高。原标签未改，样本已参与开发，只是事后回归。规则意图26/30、混合情绪11/30另列，不混算。三条不适安全下限高于旧中级标签，高风险正例0，召回不可计算。本人于2026-10-15明确确认8条原V9可见草稿可用、4条改后认可，复核收尾完成。已看自动检查意见，非独立盲测；4条助手改稿不是原模型输出，也未硬编码到默认生成逻辑。原稿10条16处系统修正留存，最终规则无检出不代表独立正确率。</a:t>
             </a:r>
             <a:endParaRPr lang="en-US" dirty="0"/>
           </a:p>
@@ -1176,7 +1176,7 @@
           <a:p>
             <a:r>
               <a:rPr lang="en-US" dirty="0"/>
-              <a:t>背景来自用户提供的赛题要求，见docs/CONTEST_REQUIREMENTS.md。信息分散和共情不足属于赛题场景描述，没有新增市场规模、真实客诉率或人效数据。</a:t>
+              <a:t>背景来自用户提供的赛题要求，见docs/CONTEST_BRIEF.md。没有新增市场规模、真实客诉率或人效数据。</a:t>
             </a:r>
             <a:endParaRPr lang="en-US" dirty="0"/>
           </a:p>
@@ -1264,7 +1264,7 @@
           <a:p>
             <a:r>
               <a:rPr lang="en-US" dirty="0"/>
-              <a:t>场景来源：evaluation/results/submission_ui_20261010/rehearsal.json。退款案例S00381的分析时点为2026-05-19 15:44:33。举报案例S00076的分析时点为2026-05-08 15:53:44。页面正文为原案例的简要概述，不是新采集的真实消费者数据。</a:t>
+              <a:t>场景来源：evaluation/results/mainline_accuracy_ui_20261014/rehearsal/rehearsal.json。退款案例S00381的分析时点为2026-05-19 15:44:33。举报案例S00076的分析时点为2026-05-08 15:53:44。正文为原案例概述，不是新采集的真实消费者数据。</a:t>
             </a:r>
             <a:endParaRPr lang="en-US" dirty="0"/>
           </a:p>
@@ -1440,7 +1440,7 @@
           <a:p>
             <a:r>
               <a:rPr lang="en-US" dirty="0"/>
-              <a:t>实现路径：src/orchestration/workbench_workflow.py、src/agents/assist_agent.py、src/ops/case_store.py。Verify节点补充证据和复核任务，文本与业务声明校验发生在Draft调用的AssistAgent中。人工审核在应用接口另存，未使用LangGraph interrupt或持久化checkpoint。</a:t>
+              <a:t>实现路径：src/orchestration/workbench_workflow.py、src/agents/assist_agent.py、src/ops/case_store.py。节点输入输出、工具和异常处理见docs/AGENT_DESIGN.md，可作为决赛设计材料。Verify节点补充证据和复核任务，文本与业务声明校验发生在Draft调用的AssistAgent中。人工审核在应用接口另存，未使用LangGraph interrupt或持久化checkpoint。</a:t>
             </a:r>
             <a:endParaRPr lang="en-US" dirty="0"/>
           </a:p>
@@ -1792,7 +1792,7 @@
           <a:p>
             <a:r>
               <a:rPr lang="en-US" dirty="0"/>
-              <a:t>截图来源：evaluation/results/submission_ui_20261010/02_refund_draft.png。左侧保留完整原图，右侧放大原截图的辅助区局部，未重绘或改写文字。录制操作：选择指定消息，先看附件快照，再切历史回放并生成建议。未来工单HV1005604873被排除。回复核入库、售后关闭原因和退款流水，仍需人工核实，不表明退款已经完成。</a:t>
+              <a:t>截图来源：evaluation/results/mainline_accuracy_ui_20261014/rehearsal/02_refund_draft.png。左侧保留完整原图，右侧放大同图辅助区，内容未改写。历史回放排除未来工单，沟通重点提醒等待结果及其原话依据。退款结果仍需人工核实。</a:t>
             </a:r>
             <a:endParaRPr lang="en-US" dirty="0"/>
           </a:p>
@@ -2436,7 +2436,7 @@
                 <a:ea typeface="Microsoft YaHei" pitchFamily="34" charset="-122"/>
                 <a:cs typeface="Microsoft YaHei" pitchFamily="34" charset="-120"/>
               </a:rPr>
-              <a:t>功能演示：人工审核与跟进任务</a:t>
+              <a:t>客服审核草稿，认领待核事项</a:t>
             </a:r>
             <a:endParaRPr lang="en-US" sz="2700" dirty="0"/>
           </a:p>
@@ -2475,7 +2475,7 @@
                 <a:ea typeface="Microsoft YaHei" pitchFamily="34" charset="-122"/>
                 <a:cs typeface="Microsoft YaHei" pitchFamily="34" charset="-120"/>
               </a:rPr>
-              <a:t>在回复编辑区保存采纳决定，再认领待核事项，处置备注和状态历史持续留存</a:t>
+              <a:t>保存修改和采纳决定，任务的负责人、处置备注和状态历史可查</a:t>
             </a:r>
             <a:endParaRPr lang="en-US" sz="1200" dirty="0"/>
           </a:p>
@@ -2584,7 +2584,7 @@
       </p:sp>
       <p:pic>
         <p:nvPicPr>
-          <p:cNvPr id="8" name="Image 0" descr="E:\1jingsai\欧莱美\github-upload\beauty-service-copilot\evaluation\results\submission_ui_20261010\03_review_and_followup.png">    </p:cNvPr>
+          <p:cNvPr id="8" name="Image 0" descr="E:\1jingsai\欧莱美\customer-service-beauty\evaluation\results\mainline_accuracy_ui_20261014\rehearsal\03_review_and_followup.png">    </p:cNvPr>
           <p:cNvPicPr>
             <a:picLocks noChangeAspect="1"/>
           </p:cNvPicPr>
@@ -2920,7 +2920,7 @@
                 <a:ea typeface="Microsoft YaHei" pitchFamily="34" charset="-122"/>
                 <a:cs typeface="Microsoft YaHei" pitchFamily="34" charset="-120"/>
               </a:rPr>
-              <a:t>功能演示：举报预警与风险看板</a:t>
+              <a:t>举报预警后，问题交给谁跟进</a:t>
             </a:r>
             <a:endParaRPr lang="en-US" sz="2700" dirty="0"/>
           </a:p>
@@ -3068,7 +3068,7 @@
       </p:sp>
       <p:pic>
         <p:nvPicPr>
-          <p:cNvPr id="8" name="Image 0" descr="E:\1jingsai\欧莱美\github-upload\beauty-service-copilot\evaluation\results\submission_ui_20261010\06_risk_owned.png">    </p:cNvPr>
+          <p:cNvPr id="8" name="Image 0" descr="E:\1jingsai\欧莱美\customer-service-beauty\evaluation\results\mainline_accuracy_ui_20261014\rehearsal\06_risk_owned.png">    </p:cNvPr>
           <p:cNvPicPr>
             <a:picLocks noChangeAspect="1"/>
           </p:cNvPicPr>
@@ -3348,7 +3348,7 @@
                 <a:ea typeface="Microsoft YaHei" pitchFamily="34" charset="-122"/>
                 <a:cs typeface="Microsoft YaHei" pitchFamily="34" charset="-120"/>
               </a:rPr>
-              <a:t>落地价值：改善接待与风险跟进方式</a:t>
+              <a:t>少查一遍记录，少问一次已有信息</a:t>
             </a:r>
             <a:endParaRPr lang="en-US" sz="2700" dirty="0"/>
           </a:p>
@@ -3387,7 +3387,7 @@
                 <a:ea typeface="Microsoft YaHei" pitchFamily="34" charset="-122"/>
                 <a:cs typeface="Microsoft YaHei" pitchFamily="34" charset="-120"/>
               </a:rPr>
-              <a:t>面向消费者、一线客服和服务管理，价值对应已实现的工作台操作</a:t>
+              <a:t>价值来自已实现的接待操作，真实客服提效仍需试点测量</a:t>
             </a:r>
             <a:endParaRPr lang="en-US" sz="1200" dirty="0"/>
           </a:p>
@@ -4083,7 +4083,7 @@
                 <a:ea typeface="Microsoft YaHei" pitchFamily="34" charset="-122"/>
                 <a:cs typeface="Microsoft YaHei" pitchFamily="34" charset="-120"/>
               </a:rPr>
-              <a:t>落地价值：成本与响应耗时实测</a:t>
+              <a:t>调用成本和等待时间分别测量</a:t>
             </a:r>
             <a:endParaRPr lang="en-US" sz="2700" dirty="0"/>
           </a:p>
@@ -4122,7 +4122,7 @@
                 <a:ea typeface="Microsoft YaHei" pitchFamily="34" charset="-122"/>
                 <a:cs typeface="Microsoft YaHei" pitchFamily="34" charset="-120"/>
               </a:rPr>
-              <a:t>10月9日同机同模型，11个共同案例交替两轮，两版各22次请求</a:t>
+              <a:t>当前完整工作流与历史协议、设备交替对照分开报告</a:t>
             </a:r>
             <a:endParaRPr lang="en-US" sz="1200" dirty="0"/>
           </a:p>
@@ -4312,7 +4312,7 @@
                 <a:ea typeface="Microsoft YaHei" pitchFamily="34" charset="-122"/>
                 <a:cs typeface="Microsoft YaHei" pitchFamily="34" charset="-120"/>
               </a:rPr>
-              <a:t>模型请求总Token</a:t>
+              <a:t>GPU响应中位</a:t>
             </a:r>
             <a:endParaRPr lang="en-US" sz="1900" dirty="0"/>
           </a:p>
@@ -4379,7 +4379,7 @@
                 <a:ea typeface="Microsoft YaHei" pitchFamily="34" charset="-122"/>
                 <a:cs typeface="Microsoft YaHei" pitchFamily="34" charset="-120"/>
               </a:rPr>
-              <a:t>-6.13%</a:t>
+              <a:t>3.82秒</a:t>
             </a:r>
             <a:endParaRPr lang="en-US" sz="4000" dirty="0"/>
           </a:p>
@@ -4418,7 +4418,7 @@
                 <a:ea typeface="Microsoft YaHei" pitchFamily="34" charset="-122"/>
                 <a:cs typeface="Microsoft YaHei" pitchFamily="34" charset="-120"/>
               </a:rPr>
-              <a:t>16368 → 15364；排除规则路径</a:t>
+              <a:t>CPU 17.18秒；3案例各2轮</a:t>
             </a:r>
             <a:endParaRPr lang="en-US" sz="1200" dirty="0"/>
           </a:p>
@@ -4507,7 +4507,7 @@
                 <a:ea typeface="Microsoft YaHei" pitchFamily="34" charset="-122"/>
                 <a:cs typeface="Microsoft YaHei" pitchFamily="34" charset="-120"/>
               </a:rPr>
-              <a:t>模型中位耗时</a:t>
+              <a:t>当前12例系统中位</a:t>
             </a:r>
             <a:endParaRPr lang="en-US" sz="1900" dirty="0"/>
           </a:p>
@@ -4574,7 +4574,7 @@
                 <a:ea typeface="Microsoft YaHei" pitchFamily="34" charset="-122"/>
                 <a:cs typeface="Microsoft YaHei" pitchFamily="34" charset="-120"/>
               </a:rPr>
-              <a:t>-19.60%</a:t>
+              <a:t>2.83秒</a:t>
             </a:r>
             <a:endParaRPr lang="en-US" sz="4000" dirty="0"/>
           </a:p>
@@ -4613,7 +4613,7 @@
                 <a:ea typeface="Microsoft YaHei" pitchFamily="34" charset="-122"/>
                 <a:cs typeface="Microsoft YaHei" pitchFamily="34" charset="-120"/>
               </a:rPr>
-              <a:t>3.030 → 2.436秒；固定请求小样本</a:t>
+              <a:t>11次生成 + 1次证据路径</a:t>
             </a:r>
             <a:endParaRPr lang="en-US" sz="1200" dirty="0"/>
           </a:p>
@@ -4702,7 +4702,7 @@
                 <a:ea typeface="Microsoft YaHei" pitchFamily="34" charset="-122"/>
                 <a:cs typeface="Microsoft YaHei" pitchFamily="34" charset="-120"/>
               </a:rPr>
-              <a:t>样本P95耗时</a:t>
+              <a:t>历史协议Token节约</a:t>
             </a:r>
             <a:endParaRPr lang="en-US" sz="1900" dirty="0"/>
           </a:p>
@@ -4769,7 +4769,7 @@
                 <a:ea typeface="Microsoft YaHei" pitchFamily="34" charset="-122"/>
                 <a:cs typeface="Microsoft YaHei" pitchFamily="34" charset="-120"/>
               </a:rPr>
-              <a:t>-22.32%</a:t>
+              <a:t>-6.13%</a:t>
             </a:r>
             <a:endParaRPr lang="en-US" sz="4000" dirty="0"/>
           </a:p>
@@ -4808,7 +4808,7 @@
                 <a:ea typeface="Microsoft YaHei" pitchFamily="34" charset="-122"/>
                 <a:cs typeface="Microsoft YaHei" pitchFamily="34" charset="-120"/>
               </a:rPr>
-              <a:t>3.375 → 2.622秒；非生产SLA</a:t>
+              <a:t>10月9日44次交替请求</a:t>
             </a:r>
             <a:endParaRPr lang="en-US" sz="1200" dirty="0"/>
           </a:p>
@@ -4872,7 +4872,7 @@
                 <a:ea typeface="Microsoft YaHei" pitchFamily="34" charset="-122"/>
                 <a:cs typeface="Microsoft YaHei" pitchFamily="34" charset="-120"/>
               </a:rPr>
-              <a:t>另测10月10日补丁12例：总Token7684，系统中位2.69秒，没有新的降本或提速结论。</a:t>
+              <a:t>当前12例8356 Token，较V8-5仅少1 Token；本轮不声称新增显著降本。</a:t>
             </a:r>
             <a:endParaRPr lang="en-US" sz="1500" dirty="0"/>
           </a:p>
@@ -4968,7 +4968,7 @@
                 <a:ea typeface="Microsoft YaHei" pitchFamily="34" charset="-122"/>
                 <a:cs typeface="Microsoft YaHei" pitchFamily="34" charset="-120"/>
               </a:rPr>
-              <a:t>落地价值：效果证据与适用边界</a:t>
+              <a:t>意图回归改善，情绪与风险仍有分歧</a:t>
             </a:r>
             <a:endParaRPr lang="en-US" sz="2700" dirty="0"/>
           </a:p>
@@ -5007,7 +5007,7 @@
                 <a:ea typeface="Microsoft YaHei" pitchFamily="34" charset="-122"/>
                 <a:cs typeface="Microsoft YaHei" pitchFamily="34" charset="-120"/>
               </a:rPr>
-              <a:t>软件回归、人工标注和回复检查分别报告，先确认可用范围再扩大试点</a:t>
+              <a:t>软件测试、已见标签回归和人工回复审核是三类不同证据</a:t>
             </a:r>
             <a:endParaRPr lang="en-US" sz="1200" dirty="0"/>
           </a:p>
@@ -5197,7 +5197,7 @@
                 <a:ea typeface="Microsoft YaHei" pitchFamily="34" charset="-122"/>
                 <a:cs typeface="Microsoft YaHei" pitchFamily="34" charset="-120"/>
               </a:rPr>
-              <a:t>已有验证</a:t>
+              <a:t>当前已验证</a:t>
             </a:r>
             <a:endParaRPr lang="en-US" sz="1900" dirty="0"/>
           </a:p>
@@ -5236,7 +5236,7 @@
                 <a:ea typeface="Microsoft YaHei" pitchFamily="34" charset="-122"/>
                 <a:cs typeface="Microsoft YaHei" pitchFamily="34" charset="-120"/>
               </a:rPr>
-              <a:t>228 项软件回归通过。</a:t>
+              <a:t>348 项软件回归，12 条回复复测。</a:t>
             </a:r>
             <a:endParaRPr lang="en-US" sz="1500" dirty="0"/>
           </a:p>
@@ -5253,7 +5253,7 @@
                 <a:ea typeface="Microsoft YaHei" pitchFamily="34" charset="-122"/>
                 <a:cs typeface="Microsoft YaHei" pitchFamily="34" charset="-120"/>
               </a:rPr>
-              <a:t>30 条人工冻结标注，12 条回复复测。</a:t>
+              <a:t>30 条原人工标注事后回归。</a:t>
             </a:r>
             <a:endParaRPr lang="en-US" sz="1500" dirty="0"/>
           </a:p>
@@ -5276,7 +5276,7 @@
                 <a:ea typeface="Microsoft YaHei" pitchFamily="34" charset="-122"/>
                 <a:cs typeface="Microsoft YaHei" pitchFamily="34" charset="-120"/>
               </a:rPr>
-              <a:t>最终声明与服务检查均0检出。</a:t>
+              <a:t>最终意图21→27/30，Macro-F1约0.6176。</a:t>
             </a:r>
             <a:endParaRPr lang="en-US" sz="1500" dirty="0"/>
           </a:p>
@@ -5293,7 +5293,24 @@
                 <a:ea typeface="Microsoft YaHei" pitchFamily="34" charset="-122"/>
                 <a:cs typeface="Microsoft YaHei" pitchFamily="34" charset="-120"/>
               </a:rPr>
-              <a:t>原稿、10条21处调整及证据ID保存。</a:t>
+              <a:t>本人复核：8条原稿可用，4条改后认可。</a:t>
+            </a:r>
+            <a:endParaRPr lang="en-US" sz="1500" dirty="0"/>
+          </a:p>
+          <a:p>
+            <a:pPr indent="0" marL="0">
+              <a:buNone/>
+            </a:pPr>
+            <a:r>
+              <a:rPr lang="en-US" sz="1500" dirty="0">
+                <a:solidFill>
+                  <a:srgbClr val="1D292B"/>
+                </a:solidFill>
+                <a:latin typeface="Microsoft YaHei" pitchFamily="34" charset="0"/>
+                <a:ea typeface="Microsoft YaHei" pitchFamily="34" charset="-122"/>
+                <a:cs typeface="Microsoft YaHei" pitchFamily="34" charset="-120"/>
+              </a:rPr>
+              <a:t>原稿及系统修正分别保留。</a:t>
             </a:r>
             <a:endParaRPr lang="en-US" sz="1500" dirty="0"/>
           </a:p>
@@ -5382,7 +5399,7 @@
                 <a:ea typeface="Microsoft YaHei" pitchFamily="34" charset="-122"/>
                 <a:cs typeface="Microsoft YaHei" pitchFamily="34" charset="-120"/>
               </a:rPr>
-              <a:t>仍需补证据</a:t>
+              <a:t>评估边界</a:t>
             </a:r>
             <a:endParaRPr lang="en-US" sz="1900" dirty="0"/>
           </a:p>
@@ -5421,7 +5438,7 @@
                 <a:ea typeface="Microsoft YaHei" pitchFamily="34" charset="-122"/>
                 <a:cs typeface="Microsoft YaHei" pitchFamily="34" charset="-120"/>
               </a:rPr>
-              <a:t>原30条规则意图21/30。</a:t>
+              <a:t>最终基础情绪同映射21/30。</a:t>
             </a:r>
             <a:endParaRPr lang="en-US" sz="1500" dirty="0"/>
           </a:p>
@@ -5438,7 +5455,7 @@
                 <a:ea typeface="Microsoft YaHei" pitchFamily="34" charset="-122"/>
                 <a:cs typeface="Microsoft YaHei" pitchFamily="34" charset="-120"/>
               </a:rPr>
-              <a:t>Macro-F1约0.4629，较改前下降。</a:t>
+              <a:t>最终风险27/30，均未提高。</a:t>
             </a:r>
             <a:endParaRPr lang="en-US" sz="1500" dirty="0"/>
           </a:p>
@@ -5455,7 +5472,7 @@
                 <a:ea typeface="Microsoft YaHei" pitchFamily="34" charset="-122"/>
                 <a:cs typeface="Microsoft YaHei" pitchFamily="34" charset="-120"/>
               </a:rPr>
-              <a:t>混合情绪10/30，风险29/30。</a:t>
+              <a:t>规则意图26/30，混合情绪11/30。</a:t>
             </a:r>
             <a:endParaRPr lang="en-US" sz="1500" dirty="0"/>
           </a:p>
@@ -5478,7 +5495,41 @@
                 <a:ea typeface="Microsoft YaHei" pitchFamily="34" charset="-122"/>
                 <a:cs typeface="Microsoft YaHei" pitchFamily="34" charset="-120"/>
               </a:rPr>
-              <a:t>高风险正例缺失，人工提效未测得。</a:t>
+              <a:t>本人已看自动检查意见，非盲评。</a:t>
+            </a:r>
+            <a:endParaRPr lang="en-US" sz="1500" dirty="0"/>
+          </a:p>
+          <a:p>
+            <a:pPr indent="0" marL="0">
+              <a:buNone/>
+            </a:pPr>
+            <a:r>
+              <a:rPr lang="en-US" sz="1500" dirty="0">
+                <a:solidFill>
+                  <a:srgbClr val="1D292B"/>
+                </a:solidFill>
+                <a:latin typeface="Microsoft YaHei" pitchFamily="34" charset="0"/>
+                <a:ea typeface="Microsoft YaHei" pitchFamily="34" charset="-122"/>
+                <a:cs typeface="Microsoft YaHei" pitchFamily="34" charset="-120"/>
+              </a:rPr>
+              <a:t>改稿认可不等于首轮全部正确。</a:t>
+            </a:r>
+            <a:endParaRPr lang="en-US" sz="1500" dirty="0"/>
+          </a:p>
+          <a:p>
+            <a:pPr indent="0" marL="0">
+              <a:buNone/>
+            </a:pPr>
+            <a:r>
+              <a:rPr lang="en-US" sz="1500" dirty="0">
+                <a:solidFill>
+                  <a:srgbClr val="1D292B"/>
+                </a:solidFill>
+                <a:latin typeface="Microsoft YaHei" pitchFamily="34" charset="0"/>
+                <a:ea typeface="Microsoft YaHei" pitchFamily="34" charset="-122"/>
+                <a:cs typeface="Microsoft YaHei" pitchFamily="34" charset="-120"/>
+              </a:rPr>
+              <a:t>高风险召回、真实人效仍未知。</a:t>
             </a:r>
             <a:endParaRPr lang="en-US" sz="1500" dirty="0"/>
           </a:p>
@@ -5638,7 +5689,7 @@
                 <a:ea typeface="Microsoft YaHei" pitchFamily="34" charset="-122"/>
                 <a:cs typeface="Microsoft YaHei" pitchFamily="34" charset="-120"/>
               </a:rPr>
-              <a:t>未来规划：验证效果后再扩大接入</a:t>
+              <a:t>先补效果证据，再扩大接入</a:t>
             </a:r>
             <a:endParaRPr lang="en-US" sz="2700" dirty="0"/>
           </a:p>
@@ -5677,7 +5728,7 @@
                 <a:ea typeface="Microsoft YaHei" pitchFamily="34" charset="-122"/>
                 <a:cs typeface="Microsoft YaHei" pitchFamily="34" charset="-120"/>
               </a:rPr>
-              <a:t>近期先补口径和效果证据，通过复核后再增加图片与平台接口</a:t>
+              <a:t>已有本人复核，后续扩大未见表达与高风险样本，再验证图片和平台接口</a:t>
             </a:r>
             <a:endParaRPr lang="en-US" sz="1200" dirty="0"/>
           </a:p>
@@ -6476,7 +6527,7 @@
                 <a:ea typeface="Microsoft YaHei" pitchFamily="34" charset="-122"/>
                 <a:cs typeface="Microsoft YaHei" pitchFamily="34" charset="-120"/>
               </a:rPr>
-              <a:t>作品背景：美妆客服的多系统接待</a:t>
+              <a:t>一次接待，要查几套记录</a:t>
             </a:r>
             <a:endParaRPr lang="en-US" sz="2700" dirty="0"/>
           </a:p>
@@ -6515,7 +6566,7 @@
                 <a:ea typeface="Microsoft YaHei" pitchFamily="34" charset="-122"/>
                 <a:cs typeface="Microsoft YaHei" pitchFamily="34" charset="-120"/>
               </a:rPr>
-              <a:t>赛题关注高并发咨询下的信息分散、回复共情和服务风险跟踪</a:t>
+              <a:t>美妆电商的订单、聊天和售后记录分散，客服难以快速还原经过</a:t>
             </a:r>
             <a:endParaRPr lang="en-US" sz="1200" dirty="0"/>
           </a:p>
@@ -7194,7 +7245,7 @@
                 <a:ea typeface="Microsoft YaHei" pitchFamily="34" charset="-122"/>
                 <a:cs typeface="Microsoft YaHei" pitchFamily="34" charset="-120"/>
               </a:rPr>
-              <a:t>场景洞察：消费者诉求背后的担忧</a:t>
+              <a:t>先听清问题，再确定查什么</a:t>
             </a:r>
             <a:endParaRPr lang="en-US" sz="2700" dirty="0"/>
           </a:p>
@@ -7233,7 +7284,7 @@
                 <a:ea typeface="Microsoft YaHei" pitchFamily="34" charset="-122"/>
                 <a:cs typeface="Microsoft YaHei" pitchFamily="34" charset="-120"/>
               </a:rPr>
-              <a:t>退款受阻与真伪疑虑，是已用真实界面彩排的两个MOCK场景</a:t>
+              <a:t>退款受阻与真伪疑虑，取自赛题虚构数据的两个操作场景</a:t>
             </a:r>
             <a:endParaRPr lang="en-US" sz="1200" dirty="0"/>
           </a:p>
@@ -7796,7 +7847,7 @@
                 <a:ea typeface="Microsoft YaHei" pitchFamily="34" charset="-122"/>
                 <a:cs typeface="Microsoft YaHei" pitchFamily="34" charset="-120"/>
               </a:rPr>
-              <a:t>场景洞察：本作品的设计取舍</a:t>
+              <a:t>客服需要的是依据和下一步</a:t>
             </a:r>
             <a:endParaRPr lang="en-US" sz="2700" dirty="0"/>
           </a:p>
@@ -7835,7 +7886,7 @@
                 <a:ea typeface="Microsoft YaHei" pitchFamily="34" charset="-122"/>
                 <a:cs typeface="Microsoft YaHei" pitchFamily="34" charset="-120"/>
               </a:rPr>
-              <a:t>围绕实际接待，把多源证据、分析时点和持续核查纳入建议流程</a:t>
+              <a:t>相关记录集中看，历史状态按时点核对，未完成事项继续跟进</a:t>
             </a:r>
             <a:endParaRPr lang="en-US" sz="1200" dirty="0"/>
           </a:p>
@@ -8531,7 +8582,7 @@
                 <a:ea typeface="Microsoft YaHei" pitchFamily="34" charset="-122"/>
                 <a:cs typeface="Microsoft YaHei" pitchFamily="34" charset="-120"/>
               </a:rPr>
-              <a:t>技术方案：工作台与Agent工作流</a:t>
+              <a:t>从业务证据到人工审核</a:t>
             </a:r>
             <a:endParaRPr lang="en-US" sz="2700" dirty="0"/>
           </a:p>
@@ -9687,7 +9738,7 @@
                 <a:ea typeface="Microsoft YaHei" pitchFamily="34" charset="-122"/>
                 <a:cs typeface="Microsoft YaHei" pitchFamily="34" charset="-120"/>
               </a:rPr>
-              <a:t>技术方案：多源融合与服务时点</a:t>
+              <a:t>把三源记录放回同一个服务时点</a:t>
             </a:r>
             <a:endParaRPr lang="en-US" sz="2700" dirty="0"/>
           </a:p>
@@ -10758,7 +10809,7 @@
                 <a:ea typeface="Microsoft YaHei" pitchFamily="34" charset="-122"/>
                 <a:cs typeface="Microsoft YaHei" pitchFamily="34" charset="-120"/>
               </a:rPr>
-              <a:t>技术方案：意图、情绪与风险分析</a:t>
+              <a:t>当前诉求、情绪和风险分别判断</a:t>
             </a:r>
             <a:endParaRPr lang="en-US" sz="2700" dirty="0"/>
           </a:p>
@@ -11026,7 +11077,7 @@
                 <a:ea typeface="Microsoft YaHei" pitchFamily="34" charset="-122"/>
                 <a:cs typeface="Microsoft YaHei" pitchFamily="34" charset="-120"/>
               </a:rPr>
-              <a:t>16类业务意图及unknown。</a:t>
+              <a:t>商品少件、损坏不被物流词带偏。</a:t>
             </a:r>
             <a:endParaRPr lang="en-US" sz="1500" dirty="0"/>
           </a:p>
@@ -11043,7 +11094,7 @@
                 <a:ea typeface="Microsoft YaHei" pitchFamily="34" charset="-122"/>
                 <a:cs typeface="Microsoft YaHei" pitchFamily="34" charset="-120"/>
               </a:rPr>
-              <a:t>明确退款、物流、改址等诉求优先识别，否定表达单独检查。</a:t>
+              <a:t>拒绝的旧诉求不再驱动处理焦点，保留没有赠品、退款没到账等真实缺失。</a:t>
             </a:r>
             <a:endParaRPr lang="en-US" sz="1500" dirty="0"/>
           </a:p>
@@ -11155,7 +11206,7 @@
                 <a:ea typeface="Microsoft YaHei" pitchFamily="34" charset="-122"/>
                 <a:cs typeface="Microsoft YaHei" pitchFamily="34" charset="-120"/>
               </a:rPr>
-              <a:t>情绪与服务风险</a:t>
+              <a:t>沟通重点与服务风险</a:t>
             </a:r>
             <a:endParaRPr lang="en-US" sz="1900" dirty="0"/>
           </a:p>
@@ -11194,7 +11245,7 @@
                 <a:ea typeface="Microsoft YaHei" pitchFamily="34" charset="-122"/>
                 <a:cs typeface="Microsoft YaHei" pitchFamily="34" charset="-120"/>
               </a:rPr>
-              <a:t>担忧、生气等基础情绪与场景标签分开。</a:t>
+              <a:t>基础情绪与场景标签分开；礼貌致谢不等于满意。</a:t>
             </a:r>
             <a:endParaRPr lang="en-US" sz="1500" dirty="0"/>
           </a:p>
@@ -11211,7 +11262,7 @@
                 <a:ea typeface="Microsoft YaHei" pitchFamily="34" charset="-122"/>
                 <a:cs typeface="Microsoft YaHei" pitchFamily="34" charset="-120"/>
               </a:rPr>
-              <a:t>退款焦急不自动归为过敏焦虑。</a:t>
+              <a:t>沿用已给资料和自述肤质，原话来源可展开。</a:t>
             </a:r>
             <a:endParaRPr lang="en-US" sz="1500" dirty="0"/>
           </a:p>
@@ -11234,7 +11285,7 @@
                 <a:ea typeface="Microsoft YaHei" pitchFamily="34" charset="-122"/>
                 <a:cs typeface="Microsoft YaHei" pitchFamily="34" charset="-120"/>
               </a:rPr>
-              <a:t>举报、重复进线和情绪升级进入人工复核任务。</a:t>
+              <a:t>实际不适按独立安全规则优先人工处理。</a:t>
             </a:r>
             <a:endParaRPr lang="en-US" sz="1500" dirty="0"/>
           </a:p>
@@ -11394,7 +11445,7 @@
                 <a:ea typeface="Microsoft YaHei" pitchFamily="34" charset="-122"/>
                 <a:cs typeface="Microsoft YaHei" pitchFamily="34" charset="-120"/>
               </a:rPr>
-              <a:t>技术方案：证据保护与成本控制</a:t>
+              <a:t>检查草稿，也控制重复调用</a:t>
             </a:r>
             <a:endParaRPr lang="en-US" sz="2700" dirty="0"/>
           </a:p>
@@ -12210,7 +12261,7 @@
                 <a:ea typeface="Microsoft YaHei" pitchFamily="34" charset="-122"/>
                 <a:cs typeface="Microsoft YaHei" pitchFamily="34" charset="-120"/>
               </a:rPr>
-              <a:t>功能演示：退货后退款受阻</a:t>
+              <a:t>退款受阻：先核记录，再回应等待</a:t>
             </a:r>
             <a:endParaRPr lang="en-US" sz="2700" dirty="0"/>
           </a:p>
@@ -12358,7 +12409,7 @@
       </p:sp>
       <p:pic>
         <p:nvPicPr>
-          <p:cNvPr id="8" name="Image 0" descr="E:\1jingsai\欧莱美\github-upload\beauty-service-copilot\evaluation\results\submission_ui_20261010\02_refund_draft.png">    </p:cNvPr>
+          <p:cNvPr id="8" name="Image 0" descr="E:\1jingsai\欧莱美\customer-service-beauty\evaluation\results\mainline_accuracy_ui_20261014\rehearsal\02_refund_draft.png">    </p:cNvPr>
           <p:cNvPicPr>
             <a:picLocks noChangeAspect="1"/>
           </p:cNvPicPr>
@@ -12421,7 +12472,7 @@
       </p:sp>
       <p:pic>
         <p:nvPicPr>
-          <p:cNvPr id="10" name="Image 1" descr="E:\1jingsai\欧莱美\github-upload\beauty-service-copilot\evaluation\results\submission_ui_20261010\02_refund_draft.png">    </p:cNvPr>
+          <p:cNvPr id="10" name="Image 1" descr="E:\1jingsai\欧莱美\customer-service-beauty\evaluation\results\mainline_accuracy_ui_20261014\rehearsal\02_refund_draft.png">    </p:cNvPr>
           <p:cNvPicPr>
             <a:picLocks noChangeAspect="1"/>
           </p:cNvPicPr>
